--- a/build/01-introduction.pptx
+++ b/build/01-introduction.pptx
@@ -3541,8 +3541,27 @@
             </a:pPr>
             <a:r>
               <a:rPr/>
-              <a:t>What is Business Intelligence?- </a:t>
-            </a:r>
+              <a:t>What is Business Intelligence?</a:t>
+            </a:r>
+          </a:p>
+        </p:txBody>
+      </p:sp>
+      <p:sp>
+        <p:nvSpPr>
+          <p:cNvPr id="3" name="Content Placeholder 2"/>
+          <p:cNvSpPr>
+            <a:spLocks noGrp="1"/>
+          </p:cNvSpPr>
+          <p:nvPr>
+            <p:ph hasCustomPrompt="1" idx="1"/>
+          </p:nvPr>
+        </p:nvSpPr>
+        <p:spPr/>
+        <p:txBody>
+          <a:bodyPr/>
+          <a:lstStyle/>
+          <a:p>
+            <a:pPr lvl="0"/>
             <a:r>
               <a:rPr b="1"/>
               <a:t>Benefits:</a:t>
@@ -3552,22 +3571,6 @@
               <a:t> handle large amounts of data efficiently</a:t>
             </a:r>
           </a:p>
-        </p:txBody>
-      </p:sp>
-      <p:sp>
-        <p:nvSpPr>
-          <p:cNvPr id="3" name="Content Placeholder 2"/>
-          <p:cNvSpPr>
-            <a:spLocks noGrp="1"/>
-          </p:cNvSpPr>
-          <p:nvPr>
-            <p:ph hasCustomPrompt="1" idx="1"/>
-          </p:nvPr>
-        </p:nvSpPr>
-        <p:spPr/>
-        <p:txBody>
-          <a:bodyPr/>
-          <a:lstStyle/>
           <a:p>
             <a:pPr lvl="0"/>
             <a:r>
@@ -3683,36 +3686,58 @@
           </a:p>
         </p:txBody>
       </p:sp>
-      <p:pic>
-        <p:nvPicPr>
-          <p:cNvPr descr="../../diagrams/week01/week1_data_to_wisdom.png" id="0" name="Picture 1"/>
-          <p:cNvPicPr>
-            <a:picLocks noGrp="1" noChangeAspect="1"/>
-          </p:cNvPicPr>
-          <p:nvPr/>
-        </p:nvPicPr>
-        <p:blipFill>
-          <a:blip r:embed="rId2"/>
-          <a:stretch>
-            <a:fillRect/>
-          </a:stretch>
-        </p:blipFill>
-        <p:spPr bwMode="auto">
-          <a:xfrm>
-            <a:off x="4572000" y="1600200"/>
-            <a:ext cx="3048000" cy="4521200"/>
-          </a:xfrm>
-          <a:prstGeom prst="rect">
-            <a:avLst/>
-          </a:prstGeom>
-          <a:noFill/>
-          <a:ln w="9525">
-            <a:noFill/>
-            <a:headEnd/>
-            <a:tailEnd/>
-          </a:ln>
-        </p:spPr>
-      </p:pic>
+      <p:sp>
+        <p:nvSpPr>
+          <p:cNvPr id="3" name="Content Placeholder 2"/>
+          <p:cNvSpPr>
+            <a:spLocks noGrp="1"/>
+          </p:cNvSpPr>
+          <p:nvPr>
+            <p:ph hasCustomPrompt="1" idx="1"/>
+          </p:nvPr>
+        </p:nvSpPr>
+        <p:spPr/>
+        <p:txBody>
+          <a:bodyPr/>
+          <a:lstStyle/>
+          <a:p>
+            <a:pPr lvl="0"/>
+            <a:r>
+              <a:rPr b="1"/>
+              <a:t>Data:</a:t>
+            </a:r>
+            <a:r>
+              <a:rPr/>
+              <a:t> raw facts describing event characteristics</a:t>
+            </a:r>
+          </a:p>
+          <a:p>
+            <a:pPr lvl="0"/>
+            <a:r>
+              <a:rPr/>
+              <a:t>Example: 51, 77, 58, 82, 64, 70</a:t>
+            </a:r>
+          </a:p>
+          <a:p>
+            <a:pPr lvl="0"/>
+            <a:r>
+              <a:rPr b="1"/>
+              <a:t>Information:</a:t>
+            </a:r>
+            <a:r>
+              <a:rPr/>
+              <a:t> data converted into meaningful insights</a:t>
+            </a:r>
+          </a:p>
+          <a:p>
+            <a:pPr lvl="0"/>
+            <a:r>
+              <a:rPr/>
+              <a:t>Example: “Test scores; average is 67”</a:t>
+            </a:r>
+          </a:p>
+        </p:txBody>
+      </p:sp>
       <p:sp>
         <p:nvSpPr>
           <p:cNvPr id="5" name="Footer Placeholder 4"/>
@@ -3782,12 +3807,12 @@
       </p:grpSpPr>
       <p:sp>
         <p:nvSpPr>
-          <p:cNvPr id="3" name="Content Placeholder 2"/>
-          <p:cNvSpPr>
-            <a:spLocks noGrp="1"/>
-          </p:cNvSpPr>
-          <p:nvPr>
-            <p:ph hasCustomPrompt="1" idx="1"/>
+          <p:cNvPr id="2" name="Title 1"/>
+          <p:cNvSpPr>
+            <a:spLocks noGrp="1"/>
+          </p:cNvSpPr>
+          <p:nvPr>
+            <p:ph hasCustomPrompt="1" type="title"/>
           </p:nvPr>
         </p:nvSpPr>
         <p:spPr/>
@@ -3800,27 +3825,41 @@
             </a:pPr>
             <a:r>
               <a:rPr/>
-              <a:t> - </a:t>
-            </a:r>
-            <a:r>
-              <a:rPr b="1"/>
-              <a:t>Data:</a:t>
-            </a:r>
-            <a:r>
-              <a:rPr/>
-              <a:t> raw facts describing event characteristics - Example: 51, 77, 58, 82, 64, 70 - </a:t>
-            </a:r>
-            <a:r>
-              <a:rPr b="1"/>
-              <a:t>Information:</a:t>
-            </a:r>
-            <a:r>
-              <a:rPr/>
-              <a:t> data converted into meaningful insights - Example: “Test scores; average is 67”</a:t>
-            </a:r>
-          </a:p>
-        </p:txBody>
-      </p:sp>
+              <a:t>Data to Wisdom Pyramid</a:t>
+            </a:r>
+          </a:p>
+        </p:txBody>
+      </p:sp>
+      <p:pic>
+        <p:nvPicPr>
+          <p:cNvPr descr="../../diagrams/week01/week1_data_to_wisdom.png" id="0" name="Picture 1"/>
+          <p:cNvPicPr>
+            <a:picLocks noGrp="1" noChangeAspect="1"/>
+          </p:cNvPicPr>
+          <p:nvPr/>
+        </p:nvPicPr>
+        <p:blipFill>
+          <a:blip r:embed="rId2"/>
+          <a:stretch>
+            <a:fillRect/>
+          </a:stretch>
+        </p:blipFill>
+        <p:spPr bwMode="auto">
+          <a:xfrm>
+            <a:off x="5499100" y="1600200"/>
+            <a:ext cx="1181100" cy="4521200"/>
+          </a:xfrm>
+          <a:prstGeom prst="rect">
+            <a:avLst/>
+          </a:prstGeom>
+          <a:noFill/>
+          <a:ln w="9525">
+            <a:noFill/>
+            <a:headEnd/>
+            <a:tailEnd/>
+          </a:ln>
+        </p:spPr>
+      </p:pic>
       <p:sp>
         <p:nvSpPr>
           <p:cNvPr id="5" name="Footer Placeholder 4"/>
@@ -3908,8 +3947,27 @@
             </a:pPr>
             <a:r>
               <a:rPr/>
-              <a:t>Data to Wisdom Pyramid- </a:t>
-            </a:r>
+              <a:t>Data to Wisdom Pyramid</a:t>
+            </a:r>
+          </a:p>
+        </p:txBody>
+      </p:sp>
+      <p:sp>
+        <p:nvSpPr>
+          <p:cNvPr id="3" name="Content Placeholder 2"/>
+          <p:cNvSpPr>
+            <a:spLocks noGrp="1"/>
+          </p:cNvSpPr>
+          <p:nvPr>
+            <p:ph hasCustomPrompt="1" idx="1"/>
+          </p:nvPr>
+        </p:nvSpPr>
+        <p:spPr/>
+        <p:txBody>
+          <a:bodyPr/>
+          <a:lstStyle/>
+          <a:p>
+            <a:pPr lvl="0"/>
             <a:r>
               <a:rPr b="1"/>
               <a:t>Knowledge:</a:t>
@@ -3919,22 +3977,6 @@
               <a:t> skills and experience coupled with information</a:t>
             </a:r>
           </a:p>
-        </p:txBody>
-      </p:sp>
-      <p:sp>
-        <p:nvSpPr>
-          <p:cNvPr id="3" name="Content Placeholder 2"/>
-          <p:cNvSpPr>
-            <a:spLocks noGrp="1"/>
-          </p:cNvSpPr>
-          <p:nvPr>
-            <p:ph hasCustomPrompt="1" idx="1"/>
-          </p:nvPr>
-        </p:nvSpPr>
-        <p:spPr/>
-        <p:txBody>
-          <a:bodyPr/>
-          <a:lstStyle/>
           <a:p>
             <a:pPr lvl="0"/>
             <a:r>
@@ -4060,8 +4102,27 @@
             </a:pPr>
             <a:r>
               <a:rPr/>
-              <a:t>Data Mining in Data Engineering- </a:t>
-            </a:r>
+              <a:t>Data Mining in Data Engineering</a:t>
+            </a:r>
+          </a:p>
+        </p:txBody>
+      </p:sp>
+      <p:sp>
+        <p:nvSpPr>
+          <p:cNvPr id="3" name="Content Placeholder 2"/>
+          <p:cNvSpPr>
+            <a:spLocks noGrp="1"/>
+          </p:cNvSpPr>
+          <p:nvPr>
+            <p:ph hasCustomPrompt="1" idx="1"/>
+          </p:nvPr>
+        </p:nvSpPr>
+        <p:spPr/>
+        <p:txBody>
+          <a:bodyPr/>
+          <a:lstStyle/>
+          <a:p>
+            <a:pPr lvl="0"/>
             <a:r>
               <a:rPr b="1"/>
               <a:t>Definition:</a:t>
@@ -4071,22 +4132,6 @@
               <a:t> computational process discovering patterns in data</a:t>
             </a:r>
           </a:p>
-        </p:txBody>
-      </p:sp>
-      <p:sp>
-        <p:nvSpPr>
-          <p:cNvPr id="3" name="Content Placeholder 2"/>
-          <p:cNvSpPr>
-            <a:spLocks noGrp="1"/>
-          </p:cNvSpPr>
-          <p:nvPr>
-            <p:ph hasCustomPrompt="1" idx="1"/>
-          </p:nvPr>
-        </p:nvSpPr>
-        <p:spPr/>
-        <p:txBody>
-          <a:bodyPr/>
-          <a:lstStyle/>
           <a:p>
             <a:pPr lvl="0"/>
             <a:r>
@@ -4190,8 +4235,27 @@
             </a:pPr>
             <a:r>
               <a:rPr/>
-              <a:t>Data Mining in Data Engineering- </a:t>
-            </a:r>
+              <a:t>Data Mining in Data Engineering</a:t>
+            </a:r>
+          </a:p>
+        </p:txBody>
+      </p:sp>
+      <p:sp>
+        <p:nvSpPr>
+          <p:cNvPr id="3" name="Content Placeholder 2"/>
+          <p:cNvSpPr>
+            <a:spLocks noGrp="1"/>
+          </p:cNvSpPr>
+          <p:nvPr>
+            <p:ph hasCustomPrompt="1" idx="1"/>
+          </p:nvPr>
+        </p:nvSpPr>
+        <p:spPr/>
+        <p:txBody>
+          <a:bodyPr/>
+          <a:lstStyle/>
+          <a:p>
+            <a:pPr lvl="0"/>
             <a:r>
               <a:rPr b="1"/>
               <a:t>Tasks:</a:t>
@@ -4201,22 +4265,6 @@
               <a:t> classification, estimation, prediction</a:t>
             </a:r>
           </a:p>
-        </p:txBody>
-      </p:sp>
-      <p:sp>
-        <p:nvSpPr>
-          <p:cNvPr id="3" name="Content Placeholder 2"/>
-          <p:cNvSpPr>
-            <a:spLocks noGrp="1"/>
-          </p:cNvSpPr>
-          <p:nvPr>
-            <p:ph hasCustomPrompt="1" idx="1"/>
-          </p:nvPr>
-        </p:nvSpPr>
-        <p:spPr/>
-        <p:txBody>
-          <a:bodyPr/>
-          <a:lstStyle/>
           <a:p>
             <a:pPr lvl="0"/>
             <a:r>
@@ -4339,8 +4387,27 @@
             </a:pPr>
             <a:r>
               <a:rPr/>
-              <a:t>Knowledge Discovery in Databases- </a:t>
-            </a:r>
+              <a:t>Knowledge Discovery in Databases</a:t>
+            </a:r>
+          </a:p>
+        </p:txBody>
+      </p:sp>
+      <p:sp>
+        <p:nvSpPr>
+          <p:cNvPr id="3" name="Content Placeholder 2"/>
+          <p:cNvSpPr>
+            <a:spLocks noGrp="1"/>
+          </p:cNvSpPr>
+          <p:nvPr>
+            <p:ph hasCustomPrompt="1" idx="1"/>
+          </p:nvPr>
+        </p:nvSpPr>
+        <p:spPr/>
+        <p:txBody>
+          <a:bodyPr/>
+          <a:lstStyle/>
+          <a:p>
+            <a:pPr lvl="0"/>
             <a:r>
               <a:rPr b="1"/>
               <a:t>Definition:</a:t>
@@ -4350,22 +4417,6 @@
               <a:t> automatic extraction of hidden knowledge</a:t>
             </a:r>
           </a:p>
-        </p:txBody>
-      </p:sp>
-      <p:sp>
-        <p:nvSpPr>
-          <p:cNvPr id="3" name="Content Placeholder 2"/>
-          <p:cNvSpPr>
-            <a:spLocks noGrp="1"/>
-          </p:cNvSpPr>
-          <p:nvPr>
-            <p:ph hasCustomPrompt="1" idx="1"/>
-          </p:nvPr>
-        </p:nvSpPr>
-        <p:spPr/>
-        <p:txBody>
-          <a:bodyPr/>
-          <a:lstStyle/>
           <a:p>
             <a:pPr lvl="0"/>
             <a:r>
@@ -4473,8 +4524,27 @@
             </a:pPr>
             <a:r>
               <a:rPr/>
-              <a:t>Knowledge Discovery in Databases- </a:t>
-            </a:r>
+              <a:t>Knowledge Discovery in Databases</a:t>
+            </a:r>
+          </a:p>
+        </p:txBody>
+      </p:sp>
+      <p:sp>
+        <p:nvSpPr>
+          <p:cNvPr id="3" name="Content Placeholder 2"/>
+          <p:cNvSpPr>
+            <a:spLocks noGrp="1"/>
+          </p:cNvSpPr>
+          <p:nvPr>
+            <p:ph hasCustomPrompt="1" idx="1"/>
+          </p:nvPr>
+        </p:nvSpPr>
+        <p:spPr/>
+        <p:txBody>
+          <a:bodyPr/>
+          <a:lstStyle/>
+          <a:p>
+            <a:pPr lvl="0"/>
             <a:r>
               <a:rPr b="1"/>
               <a:t>Intersecting fields:</a:t>
@@ -4484,22 +4554,6 @@
               <a:t> databases, statistics, machine learning</a:t>
             </a:r>
           </a:p>
-        </p:txBody>
-      </p:sp>
-      <p:sp>
-        <p:nvSpPr>
-          <p:cNvPr id="3" name="Content Placeholder 2"/>
-          <p:cNvSpPr>
-            <a:spLocks noGrp="1"/>
-          </p:cNvSpPr>
-          <p:nvPr>
-            <p:ph hasCustomPrompt="1" idx="1"/>
-          </p:nvPr>
-        </p:nvSpPr>
-        <p:spPr/>
-        <p:txBody>
-          <a:bodyPr/>
-          <a:lstStyle/>
           <a:p>
             <a:pPr lvl="0"/>
             <a:r>
@@ -7982,56 +8036,44 @@
             </a:pPr>
             <a:r>
               <a:rPr/>
-              <a:t>ETL vs ELT- </a:t>
-            </a:r>
+              <a:t>ETL vs ELT</a:t>
+            </a:r>
+          </a:p>
+        </p:txBody>
+      </p:sp>
+      <p:sp>
+        <p:nvSpPr>
+          <p:cNvPr id="3" name="Content Placeholder 2"/>
+          <p:cNvSpPr>
+            <a:spLocks noGrp="1"/>
+          </p:cNvSpPr>
+          <p:nvPr>
+            <p:ph hasCustomPrompt="1" idx="1"/>
+          </p:nvPr>
+        </p:nvSpPr>
+        <p:spPr/>
+        <p:txBody>
+          <a:bodyPr/>
+          <a:lstStyle/>
+          <a:p>
+            <a:pPr lvl="0" indent="0" marL="0">
+              <a:buNone/>
+            </a:pPr>
             <a:r>
               <a:rPr b="1"/>
               <a:t>ETL:</a:t>
             </a:r>
             <a:r>
               <a:rPr/>
-              <a:t> Extract → Transform → Load</a:t>
-            </a:r>
-          </a:p>
-        </p:txBody>
-      </p:sp>
-      <p:sp>
-        <p:nvSpPr>
-          <p:cNvPr id="3" name="Content Placeholder 2"/>
-          <p:cNvSpPr>
-            <a:spLocks noGrp="1"/>
-          </p:cNvSpPr>
-          <p:nvPr>
-            <p:ph hasCustomPrompt="1" idx="1"/>
-          </p:nvPr>
-        </p:nvSpPr>
-        <p:spPr/>
-        <p:txBody>
-          <a:bodyPr/>
-          <a:lstStyle/>
-          <a:p>
-            <a:pPr lvl="0"/>
-            <a:r>
-              <a:rPr/>
-              <a:t>Transform before load; smaller storage, faster queries</a:t>
-            </a:r>
-          </a:p>
-          <a:p>
-            <a:pPr lvl="0"/>
+              <a:t> Extract → Transform → Load - Transform before load; smaller storage, faster queries - </a:t>
+            </a:r>
             <a:r>
               <a:rPr b="1"/>
               <a:t>ELT:</a:t>
             </a:r>
             <a:r>
               <a:rPr/>
-              <a:t> Extract → Load → Transform</a:t>
-            </a:r>
-          </a:p>
-          <a:p>
-            <a:pPr lvl="0"/>
-            <a:r>
-              <a:rPr/>
-              <a:t>Load raw first; preserve raw data, flexible analytics later</a:t>
+              <a:t> Extract → Load → Transform - Load raw first; preserve raw data, flexible analytics later</a:t>
             </a:r>
           </a:p>
         </p:txBody>
@@ -8123,60 +8165,45 @@
             </a:pPr>
             <a:r>
               <a:rPr/>
-              <a:t>ETL vs ELT- </a:t>
-            </a:r>
+              <a:t>ETL vs ELT</a:t>
+            </a:r>
+          </a:p>
+        </p:txBody>
+      </p:sp>
+      <p:sp>
+        <p:nvSpPr>
+          <p:cNvPr id="3" name="Content Placeholder 2"/>
+          <p:cNvSpPr>
+            <a:spLocks noGrp="1"/>
+          </p:cNvSpPr>
+          <p:nvPr>
+            <p:ph hasCustomPrompt="1" idx="1"/>
+          </p:nvPr>
+        </p:nvSpPr>
+        <p:spPr/>
+        <p:txBody>
+          <a:bodyPr/>
+          <a:lstStyle/>
+          <a:p>
+            <a:pPr lvl="0" indent="0" marL="0">
+              <a:buNone/>
+            </a:pPr>
             <a:r>
               <a:rPr b="1"/>
               <a:t>ETL cost:</a:t>
             </a:r>
             <a:r>
               <a:rPr/>
-              <a:t> compute up front + less storage</a:t>
-            </a:r>
-          </a:p>
-        </p:txBody>
-      </p:sp>
-      <p:sp>
-        <p:nvSpPr>
-          <p:cNvPr id="3" name="Content Placeholder 2"/>
-          <p:cNvSpPr>
-            <a:spLocks noGrp="1"/>
-          </p:cNvSpPr>
-          <p:nvPr>
-            <p:ph hasCustomPrompt="1" idx="1"/>
-          </p:nvPr>
-        </p:nvSpPr>
-        <p:spPr/>
-        <p:txBody>
-          <a:bodyPr/>
-          <a:lstStyle/>
-          <a:p>
-            <a:pPr lvl="0"/>
+              <a:t> compute up front + less storage - </a:t>
+            </a:r>
             <a:r>
               <a:rPr b="1"/>
               <a:t>ELT cost:</a:t>
             </a:r>
             <a:r>
               <a:rPr/>
-              <a:t> more storage + compute on demand</a:t>
-            </a:r>
-          </a:p>
-          <a:p>
-            <a:pPr lvl="0"/>
-            <a:r>
-              <a:rPr/>
-              <a:t>ETL: good when schema and consumers are stable</a:t>
-            </a:r>
-          </a:p>
-          <a:p>
-            <a:pPr lvl="0"/>
-            <a:r>
-              <a:rPr/>
-              <a:t>ELT: good when requirements change</a:t>
-            </a:r>
-          </a:p>
-          <a:p>
-            <a:pPr lvl="0"/>
+              <a:t> more storage + compute on demand - ETL: good when schema and consumers are stable - ELT: good when requirements change - </a:t>
+            </a:r>
             <a:r>
               <a:rPr b="1"/>
               <a:t>Opinion:</a:t>
@@ -8723,8 +8750,27 @@
             </a:pPr>
             <a:r>
               <a:rPr/>
-              <a:t>Core Concepts- </a:t>
-            </a:r>
+              <a:t>Core Concepts</a:t>
+            </a:r>
+          </a:p>
+        </p:txBody>
+      </p:sp>
+      <p:sp>
+        <p:nvSpPr>
+          <p:cNvPr id="3" name="Content Placeholder 2"/>
+          <p:cNvSpPr>
+            <a:spLocks noGrp="1"/>
+          </p:cNvSpPr>
+          <p:nvPr>
+            <p:ph hasCustomPrompt="1" idx="1"/>
+          </p:nvPr>
+        </p:nvSpPr>
+        <p:spPr/>
+        <p:txBody>
+          <a:bodyPr/>
+          <a:lstStyle/>
+          <a:p>
+            <a:pPr lvl="0"/>
             <a:r>
               <a:rPr b="1"/>
               <a:t>One clear choice per pipeline:</a:t>
@@ -8734,22 +8780,6 @@
               <a:t> ETL or ELT</a:t>
             </a:r>
           </a:p>
-        </p:txBody>
-      </p:sp>
-      <p:sp>
-        <p:nvSpPr>
-          <p:cNvPr id="3" name="Content Placeholder 2"/>
-          <p:cNvSpPr>
-            <a:spLocks noGrp="1"/>
-          </p:cNvSpPr>
-          <p:nvPr>
-            <p:ph hasCustomPrompt="1" idx="1"/>
-          </p:nvPr>
-        </p:nvSpPr>
-        <p:spPr/>
-        <p:txBody>
-          <a:bodyPr/>
-          <a:lstStyle/>
           <a:p>
             <a:pPr lvl="0"/>
             <a:r>
@@ -8860,7 +8890,30 @@
             </a:pPr>
             <a:r>
               <a:rPr/>
-              <a:t>Cost of Naïve Design — What Goes Wrong Without Discipline- </a:t>
+              <a:t>Cost of Naïve Design</a:t>
+            </a:r>
+          </a:p>
+        </p:txBody>
+      </p:sp>
+      <p:sp>
+        <p:nvSpPr>
+          <p:cNvPr id="3" name="Content Placeholder 2"/>
+          <p:cNvSpPr>
+            <a:spLocks noGrp="1"/>
+          </p:cNvSpPr>
+          <p:nvPr>
+            <p:ph hasCustomPrompt="1" idx="1"/>
+          </p:nvPr>
+        </p:nvSpPr>
+        <p:spPr/>
+        <p:txBody>
+          <a:bodyPr/>
+          <a:lstStyle/>
+          <a:p>
+            <a:pPr lvl="0"/>
+            <a:r>
+              <a:rPr/>
+              <a:t>What Goes Wrong Without Discipline- </a:t>
             </a:r>
             <a:r>
               <a:rPr b="1"/>
@@ -8871,22 +8924,6 @@
               <a:t> “one script, one DB, run nightly”</a:t>
             </a:r>
           </a:p>
-        </p:txBody>
-      </p:sp>
-      <p:sp>
-        <p:nvSpPr>
-          <p:cNvPr id="3" name="Content Placeholder 2"/>
-          <p:cNvSpPr>
-            <a:spLocks noGrp="1"/>
-          </p:cNvSpPr>
-          <p:nvPr>
-            <p:ph hasCustomPrompt="1" idx="1"/>
-          </p:nvPr>
-        </p:nvSpPr>
-        <p:spPr/>
-        <p:txBody>
-          <a:bodyPr/>
-          <a:lstStyle/>
           <a:p>
             <a:pPr lvl="0"/>
             <a:r>
@@ -8990,8 +9027,27 @@
             </a:pPr>
             <a:r>
               <a:rPr/>
-              <a:t>What Goes Wrong Without Discipline- </a:t>
-            </a:r>
+              <a:t>What Goes Wrong Without Discipline</a:t>
+            </a:r>
+          </a:p>
+        </p:txBody>
+      </p:sp>
+      <p:sp>
+        <p:nvSpPr>
+          <p:cNvPr id="3" name="Content Placeholder 2"/>
+          <p:cNvSpPr>
+            <a:spLocks noGrp="1"/>
+          </p:cNvSpPr>
+          <p:nvPr>
+            <p:ph hasCustomPrompt="1" idx="1"/>
+          </p:nvPr>
+        </p:nvSpPr>
+        <p:spPr/>
+        <p:txBody>
+          <a:bodyPr/>
+          <a:lstStyle/>
+          <a:p>
+            <a:pPr lvl="0"/>
             <a:r>
               <a:rPr b="1"/>
               <a:t>Naïve:</a:t>
@@ -9001,22 +9057,6 @@
               <a:t> no raw layer — cannot reprocess on schema change</a:t>
             </a:r>
           </a:p>
-        </p:txBody>
-      </p:sp>
-      <p:sp>
-        <p:nvSpPr>
-          <p:cNvPr id="3" name="Content Placeholder 2"/>
-          <p:cNvSpPr>
-            <a:spLocks noGrp="1"/>
-          </p:cNvSpPr>
-          <p:nvPr>
-            <p:ph hasCustomPrompt="1" idx="1"/>
-          </p:nvPr>
-        </p:nvSpPr>
-        <p:spPr/>
-        <p:txBody>
-          <a:bodyPr/>
-          <a:lstStyle/>
           <a:p>
             <a:pPr lvl="0"/>
             <a:r>
@@ -15517,8 +15557,27 @@
             </a:pPr>
             <a:r>
               <a:rPr/>
-              <a:t>What is Business Intelligence?- </a:t>
-            </a:r>
+              <a:t>What is Business Intelligence?</a:t>
+            </a:r>
+          </a:p>
+        </p:txBody>
+      </p:sp>
+      <p:sp>
+        <p:nvSpPr>
+          <p:cNvPr id="3" name="Content Placeholder 2"/>
+          <p:cNvSpPr>
+            <a:spLocks noGrp="1"/>
+          </p:cNvSpPr>
+          <p:nvPr>
+            <p:ph hasCustomPrompt="1" idx="1"/>
+          </p:nvPr>
+        </p:nvSpPr>
+        <p:spPr/>
+        <p:txBody>
+          <a:bodyPr/>
+          <a:lstStyle/>
+          <a:p>
+            <a:pPr lvl="0"/>
             <a:r>
               <a:rPr b="1"/>
               <a:t>Definition:</a:t>
@@ -15528,22 +15587,6 @@
               <a:t> methodologies and technologies transforming raw data</a:t>
             </a:r>
           </a:p>
-        </p:txBody>
-      </p:sp>
-      <p:sp>
-        <p:nvSpPr>
-          <p:cNvPr id="3" name="Content Placeholder 2"/>
-          <p:cNvSpPr>
-            <a:spLocks noGrp="1"/>
-          </p:cNvSpPr>
-          <p:nvPr>
-            <p:ph hasCustomPrompt="1" idx="1"/>
-          </p:nvPr>
-        </p:nvSpPr>
-        <p:spPr/>
-        <p:txBody>
-          <a:bodyPr/>
-          <a:lstStyle/>
           <a:p>
             <a:pPr lvl="0"/>
             <a:r>
